--- a/assets/powerpoints/module-n2-panier/E1-je-me-lance.pptx
+++ b/assets/powerpoints/module-n2-panier/E1-je-me-lance.pptx
@@ -8823,7 +8823,25 @@
                 </a:solidFill>
                 <a:latin typeface="Verdana"/>
               </a:rPr>
-              <a:t>« Attendez, s'il vous plaît. Le poulet est &lt;b&gt;en spécial&lt;/b&gt;. J'ai la circulaire. » On montre la page, on montre le prix. La date, en haut de la circulaire, dit si le spécial est encore bon.</a:t>
+              <a:t>« Attendez, s'il vous plaît. Le poulet est </a:t>
+            </a:r>
+            <a:r>
+              <a:rPr sz="2000" b="1" i="0">
+                <a:solidFill>
+                  <a:srgbClr val="4B4F52"/>
+                </a:solidFill>
+                <a:latin typeface="Verdana"/>
+              </a:rPr>
+              <a:t>en spécial</a:t>
+            </a:r>
+            <a:r>
+              <a:rPr sz="2000" b="0" i="0">
+                <a:solidFill>
+                  <a:srgbClr val="4B4F52"/>
+                </a:solidFill>
+                <a:latin typeface="Verdana"/>
+              </a:rPr>
+              <a:t>. J'ai la circulaire. » On montre la page, on montre le prix. La date, en haut de la circulaire, dit si le spécial est encore bon.</a:t>
             </a:r>
           </a:p>
         </p:txBody>
